--- a/builder/assets/reference-pages/histogram.pptx
+++ b/builder/assets/reference-pages/histogram.pptx
@@ -447,12 +447,12 @@
           </a:p>
           <a:p xmlns:a="http://schemas.openxmlformats.org/drawingml/2006/main">
             <a:r>
-              <a:t>- 合成示例数据，非真实客户数据</a:t>
+              <a:t>- Synthetic sample data, not real customer data</a:t>
             </a:r>
           </a:p>
           <a:p xmlns:a="http://schemas.openxmlformats.org/drawingml/2006/main">
             <a:r>
-              <a:t>- 指标：匿名事务处理时长；单位：分钟；期间：2026年7月；分箱边界：0, 10, 20, 30, 40, 50, 60, 70, 80。</a:t>
+              <a:t>- Indicator: Anonymous transaction processing time; unit: minutes; period:2026year7Month; binning boundary:0, 10, 20, 30, 40, 50, 60, 70, 80.</a:t>
             </a:r>
           </a:p>
         </p:txBody>
@@ -1113,7 +1113,7 @@
                   <a:srgbClr val="15375F"/>
                 </a:solidFill>
               </a:rPr>
-              <a:t>处理时长主要集中在20–40分钟，右侧长尾延伸至80分钟</a:t>
+              <a:t>The processing time is mainly concentrated in20–40minutes, the long tail on the right extends to80minutes</a:t>
             </a:r>
           </a:p>
         </p:txBody>
@@ -1165,7 +1165,7 @@
                   <a:srgbClr val="697386"/>
                 </a:solidFill>
               </a:rPr>
-              <a:t>合成示例数据，非真实客户数据</a:t>
+              <a:t>Synthetic sample data, not real customer data</a:t>
             </a:r>
           </a:p>
         </p:txBody>
@@ -1665,7 +1665,7 @@
                   <a:srgbClr val="15375F"/>
                 </a:solidFill>
               </a:rPr>
-              <a:t>频数（个）</a:t>
+              <a:t>Frequency (number)</a:t>
             </a:r>
           </a:p>
         </p:txBody>
@@ -2813,7 +2813,7 @@
                   <a:srgbClr val="15375F"/>
                 </a:solidFill>
               </a:rPr>
-              <a:t>匿名事务处理时长（分钟）</a:t>
+              <a:t>Anonymous transaction processing time (minutes)</a:t>
             </a:r>
           </a:p>
         </p:txBody>
@@ -2865,14 +2865,14 @@
                   <a:srgbClr val="697386"/>
                 </a:solidFill>
               </a:rPr>
-              <a:t>样本 50，有效 48，缺失 2；左闭右开，末箱含上界；期间：2026年7月</a:t>
+              <a:t>sample 50, valid 48, missing 2; Closed on the left and open on the right, the last box contains the upper bound; Period:2026year7month</a:t>
             </a:r>
           </a:p>
         </p:txBody>
       </p:sp>
       <p:sp>
         <p:nvSpPr>
-          <p:cNvPr id="41" name="分布解读-rail">
+          <p:cNvPr id="41" name="Distribution interpretation-rail">
             <a:extLst xmlns:a="http://schemas.openxmlformats.org/drawingml/2006/main">
               <a:ext uri="{FF2B5EF4-FFF2-40B4-BE49-F238E27FC236}">
                 <a16:creationId xmlns:a16="http://schemas.microsoft.com/office/drawing/2014/main" id="{E9AD712D-2C86-44F2-904C-C9E5360B5250}"/>
@@ -2905,7 +2905,7 @@
       </p:sp>
       <p:sp>
         <p:nvSpPr>
-          <p:cNvPr id="42" name="分布解读-title">
+          <p:cNvPr id="42" name="Distribution interpretation-title">
             <a:extLst xmlns:a="http://schemas.openxmlformats.org/drawingml/2006/main">
               <a:ext uri="{FF2B5EF4-FFF2-40B4-BE49-F238E27FC236}">
                 <a16:creationId xmlns:a16="http://schemas.microsoft.com/office/drawing/2014/main" id="{852CDA3B-43AE-4963-83AB-FFCC327867AC}"/>
@@ -2950,14 +2950,14 @@
                   <a:srgbClr val="15375F"/>
                 </a:solidFill>
               </a:rPr>
-              <a:t>分布解读</a:t>
+              <a:t>Distribution interpretation</a:t>
             </a:r>
           </a:p>
         </p:txBody>
       </p:sp>
       <p:sp>
         <p:nvSpPr>
-          <p:cNvPr id="43" name="分布解读-item-1">
+          <p:cNvPr id="43" name="Distribution interpretation-item-1">
             <a:extLst xmlns:a="http://schemas.openxmlformats.org/drawingml/2006/main">
               <a:ext uri="{FF2B5EF4-FFF2-40B4-BE49-F238E27FC236}">
                 <a16:creationId xmlns:a16="http://schemas.microsoft.com/office/drawing/2014/main" id="{5CCDCBD2-1F3E-4E18-AF6E-CC300E271E22}"/>
@@ -3006,14 +3006,14 @@
                   <a:srgbClr val="172033"/>
                 </a:solidFill>
               </a:rPr>
-              <a:t>20–40分钟包含26个有效样本，占54.2%</a:t>
+              <a:t>20–40minutes include26valid samples, accounting for54.2%</a:t>
             </a:r>
           </a:p>
         </p:txBody>
       </p:sp>
       <p:sp>
         <p:nvSpPr>
-          <p:cNvPr id="44" name="分布解读-item-2">
+          <p:cNvPr id="44" name="Distribution interpretation-item-2">
             <a:extLst xmlns:a="http://schemas.openxmlformats.org/drawingml/2006/main">
               <a:ext uri="{FF2B5EF4-FFF2-40B4-BE49-F238E27FC236}">
                 <a16:creationId xmlns:a16="http://schemas.microsoft.com/office/drawing/2014/main" id="{DB9FCD1E-531D-4765-9815-9605CD7148CE}"/>
@@ -3062,14 +3062,14 @@
                   <a:srgbClr val="172033"/>
                 </a:solidFill>
               </a:rPr>
-              <a:t>60分钟及以上仅2个，占4.2%，但形成右侧长尾</a:t>
+              <a:t>60minutes and above only2one, accounting for4.2%, but forms a long tail on the right</a:t>
             </a:r>
           </a:p>
         </p:txBody>
       </p:sp>
       <p:sp>
         <p:nvSpPr>
-          <p:cNvPr id="45" name="分布解读-item-3">
+          <p:cNvPr id="45" name="Distribution interpretation-item-3">
             <a:extLst xmlns:a="http://schemas.openxmlformats.org/drawingml/2006/main">
               <a:ext uri="{FF2B5EF4-FFF2-40B4-BE49-F238E27FC236}">
                 <a16:creationId xmlns:a16="http://schemas.microsoft.com/office/drawing/2014/main" id="{DA3F6BDF-F298-4744-8A8A-831F744BB451}"/>
@@ -3118,7 +3118,7 @@
                   <a:srgbClr val="172033"/>
                 </a:solidFill>
               </a:rPr>
-              <a:t>20–30分钟为峰值区间（14个）</a:t>
+              <a:t>20–30minutes is the peak interval (14)</a:t>
             </a:r>
           </a:p>
         </p:txBody>
@@ -3174,7 +3174,7 @@
                   <a:srgbClr val="15375F"/>
                 </a:solidFill>
               </a:rPr>
-              <a:t>处理时长主要集中在20–40分钟，右侧长尾延伸至80分钟</a:t>
+              <a:t>The processing time is mainly concentrated in20–40minutes, the long tail on the right extends to80minutes</a:t>
             </a:r>
           </a:p>
         </p:txBody>
